--- a/Fase 2/Evidencias Grupales/Presentacion Proyecto Fase 2.pptx
+++ b/Fase 2/Evidencias Grupales/Presentacion Proyecto Fase 2.pptx
@@ -12353,6 +12353,18 @@
                 <a:buChar char="●"/>
               </a:pPr>
               <a:r>
+                <a:rPr b="1" lang="es" sz="950">
+                  <a:solidFill>
+                    <a:srgbClr val="475569"/>
+                  </a:solidFill>
+                  <a:latin typeface="Inter"/>
+                  <a:ea typeface="Inter"/>
+                  <a:cs typeface="Inter"/>
+                  <a:sym typeface="Inter"/>
+                </a:rPr>
+                <a:t>Perfil:</a:t>
+              </a:r>
+              <a:r>
                 <a:rPr lang="es" sz="950">
                   <a:solidFill>
                     <a:srgbClr val="475569"/>
@@ -12362,7 +12374,7 @@
                   <a:cs typeface="Inter"/>
                   <a:sym typeface="Inter"/>
                 </a:rPr>
-                <a:t>Diseño de software y resolución de problemas</a:t>
+                <a:t xml:space="preserve"> evaluar y gestionar proyectos</a:t>
               </a:r>
               <a:endParaRPr sz="950">
                 <a:solidFill>
@@ -12399,7 +12411,7 @@
                   <a:cs typeface="Inter"/>
                   <a:sym typeface="Inter"/>
                 </a:rPr>
-                <a:t>Gestión del proyecto con Scrum y Git</a:t>
+                <a:t>Diseño de software y resolución de problemas</a:t>
               </a:r>
               <a:endParaRPr sz="950">
                 <a:solidFill>
@@ -12427,6 +12439,18 @@
                 <a:buChar char="●"/>
               </a:pPr>
               <a:r>
+                <a:rPr b="1" lang="es" sz="950">
+                  <a:solidFill>
+                    <a:srgbClr val="475569"/>
+                  </a:solidFill>
+                  <a:latin typeface="Inter"/>
+                  <a:ea typeface="Inter"/>
+                  <a:cs typeface="Inter"/>
+                  <a:sym typeface="Inter"/>
+                </a:rPr>
+                <a:t>Proyección:</a:t>
+              </a:r>
+              <a:r>
                 <a:rPr lang="es" sz="950">
                   <a:solidFill>
                     <a:srgbClr val="475569"/>
@@ -12436,7 +12460,7 @@
                   <a:cs typeface="Inter"/>
                   <a:sym typeface="Inter"/>
                 </a:rPr>
-                <a:t>Proyección: QA, ciberseguridad o desarrollo</a:t>
+                <a:t xml:space="preserve"> QA, ciberseguridad o desarrollo</a:t>
               </a:r>
               <a:endParaRPr sz="950">
                 <a:solidFill>
@@ -12633,7 +12657,7 @@
                 <a:buChar char="●"/>
               </a:pPr>
               <a:r>
-                <a:rPr lang="es" sz="950">
+                <a:rPr b="1" lang="es" sz="950">
                   <a:solidFill>
                     <a:srgbClr val="475569"/>
                   </a:solidFill>
@@ -12642,33 +12666,8 @@
                   <a:cs typeface="Inter"/>
                   <a:sym typeface="Inter"/>
                 </a:rPr>
-                <a:t>Bases de datos y soporte aplicativo</a:t>
+                <a:t>Perfil:</a:t>
               </a:r>
-              <a:endParaRPr sz="950">
-                <a:solidFill>
-                  <a:srgbClr val="475569"/>
-                </a:solidFill>
-                <a:latin typeface="Inter"/>
-                <a:ea typeface="Inter"/>
-                <a:cs typeface="Inter"/>
-                <a:sym typeface="Inter"/>
-              </a:endParaRPr>
-            </a:p>
-            <a:p>
-              <a:pPr indent="-288925" lvl="0" marL="457200" rtl="0" algn="l">
-                <a:spcBef>
-                  <a:spcPts val="900"/>
-                </a:spcBef>
-                <a:spcAft>
-                  <a:spcPts val="0"/>
-                </a:spcAft>
-                <a:buClr>
-                  <a:srgbClr val="475569"/>
-                </a:buClr>
-                <a:buSzPts val="950"/>
-                <a:buFont typeface="Inter"/>
-                <a:buChar char="●"/>
-              </a:pPr>
               <a:r>
                 <a:rPr lang="es" sz="950">
                   <a:solidFill>
@@ -12679,7 +12678,7 @@
                   <a:cs typeface="Inter"/>
                   <a:sym typeface="Inter"/>
                 </a:rPr>
-                <a:t>Análisis de requerimientos</a:t>
+                <a:t xml:space="preserve"> bases de datos e ingeniería de requisitos</a:t>
               </a:r>
               <a:endParaRPr sz="950">
                 <a:solidFill>
@@ -12717,6 +12716,55 @@
                   <a:sym typeface="Inter"/>
                 </a:rPr>
                 <a:t>Aprender un negocio nuevo: trazabilidad de fruta</a:t>
+              </a:r>
+              <a:endParaRPr sz="950">
+                <a:solidFill>
+                  <a:srgbClr val="475569"/>
+                </a:solidFill>
+                <a:latin typeface="Inter"/>
+                <a:ea typeface="Inter"/>
+                <a:cs typeface="Inter"/>
+                <a:sym typeface="Inter"/>
+              </a:endParaRPr>
+            </a:p>
+            <a:p>
+              <a:pPr indent="-288925" lvl="0" marL="457200" rtl="0" algn="l">
+                <a:spcBef>
+                  <a:spcPts val="900"/>
+                </a:spcBef>
+                <a:spcAft>
+                  <a:spcPts val="0"/>
+                </a:spcAft>
+                <a:buClr>
+                  <a:srgbClr val="475569"/>
+                </a:buClr>
+                <a:buSzPts val="950"/>
+                <a:buFont typeface="Inter"/>
+                <a:buChar char="●"/>
+              </a:pPr>
+              <a:r>
+                <a:rPr b="1" lang="es" sz="950">
+                  <a:solidFill>
+                    <a:srgbClr val="475569"/>
+                  </a:solidFill>
+                  <a:latin typeface="Inter"/>
+                  <a:ea typeface="Inter"/>
+                  <a:cs typeface="Inter"/>
+                  <a:sym typeface="Inter"/>
+                </a:rPr>
+                <a:t>Interés:</a:t>
+              </a:r>
+              <a:r>
+                <a:rPr lang="es" sz="950">
+                  <a:solidFill>
+                    <a:srgbClr val="475569"/>
+                  </a:solidFill>
+                  <a:latin typeface="Inter"/>
+                  <a:ea typeface="Inter"/>
+                  <a:cs typeface="Inter"/>
+                  <a:sym typeface="Inter"/>
+                </a:rPr>
+                <a:t xml:space="preserve"> soporte aplicativo y desarrollo</a:t>
               </a:r>
               <a:endParaRPr sz="950">
                 <a:solidFill>
@@ -12913,6 +12961,18 @@
                 <a:buChar char="●"/>
               </a:pPr>
               <a:r>
+                <a:rPr b="1" lang="es" sz="950">
+                  <a:solidFill>
+                    <a:srgbClr val="475569"/>
+                  </a:solidFill>
+                  <a:latin typeface="Inter"/>
+                  <a:ea typeface="Inter"/>
+                  <a:cs typeface="Inter"/>
+                  <a:sym typeface="Inter"/>
+                </a:rPr>
+                <a:t>Perfil:</a:t>
+              </a:r>
+              <a:r>
                 <a:rPr lang="es" sz="950">
                   <a:solidFill>
                     <a:srgbClr val="475569"/>
@@ -12922,7 +12982,7 @@
                   <a:cs typeface="Inter"/>
                   <a:sym typeface="Inter"/>
                 </a:rPr>
-                <a:t>Aseguramiento de calidad</a:t>
+                <a:t xml:space="preserve"> software de calidad y seguro</a:t>
               </a:r>
               <a:endParaRPr sz="950">
                 <a:solidFill>
@@ -12987,6 +13047,18 @@
                 <a:buChar char="●"/>
               </a:pPr>
               <a:r>
+                <a:rPr b="1" lang="es" sz="950">
+                  <a:solidFill>
+                    <a:srgbClr val="475569"/>
+                  </a:solidFill>
+                  <a:latin typeface="Inter"/>
+                  <a:ea typeface="Inter"/>
+                  <a:cs typeface="Inter"/>
+                  <a:sym typeface="Inter"/>
+                </a:rPr>
+                <a:t>Proyección:</a:t>
+              </a:r>
+              <a:r>
                 <a:rPr lang="es" sz="950">
                   <a:solidFill>
                     <a:srgbClr val="475569"/>
@@ -12996,7 +13068,7 @@
                   <a:cs typeface="Inter"/>
                   <a:sym typeface="Inter"/>
                 </a:rPr>
-                <a:t>Proyección: QA Tester y automatización</a:t>
+                <a:t xml:space="preserve"> QA Tester y automatización</a:t>
               </a:r>
               <a:endParaRPr sz="950">
                 <a:solidFill>
@@ -16117,7 +16189,7 @@
                   <a:cs typeface="Plus Jakarta Sans"/>
                   <a:sym typeface="Plus Jakarta Sans"/>
                 </a:rPr>
-                <a:t>Competencias del perfil</a:t>
+                <a:t>Competencias del perfil de egreso</a:t>
               </a:r>
               <a:endParaRPr b="1" sz="1400">
                 <a:solidFill>
@@ -16154,7 +16226,7 @@
                   <a:cs typeface="Inter"/>
                   <a:sym typeface="Inter"/>
                 </a:rPr>
-                <a:t>Gestionar proyectos con metodologías ágiles</a:t>
+                <a:t>Evaluar y gestionar proyectos en todo su ciclo de vida</a:t>
               </a:r>
               <a:endParaRPr b="0" sz="1100">
                 <a:solidFill>
@@ -16191,7 +16263,7 @@
                   <a:cs typeface="Inter"/>
                   <a:sym typeface="Inter"/>
                 </a:rPr>
-                <a:t>Diseñar arquitecturas y modelos de datos</a:t>
+                <a:t>Diseñar soluciones de información con bases de datos</a:t>
               </a:r>
               <a:endParaRPr b="0" sz="1100">
                 <a:solidFill>
@@ -16228,7 +16300,7 @@
                   <a:cs typeface="Inter"/>
                   <a:sym typeface="Inter"/>
                 </a:rPr>
-                <a:t>Implementar autenticación y control de acceso</a:t>
+                <a:t>Diseñar y adaptar procesos de ingeniería de requisitos</a:t>
               </a:r>
               <a:endParaRPr b="0" sz="1100">
                 <a:solidFill>
@@ -16265,7 +16337,7 @@
                   <a:cs typeface="Inter"/>
                   <a:sym typeface="Inter"/>
                 </a:rPr>
-                <a:t>Realizar pruebas funcionales y de seguridad</a:t>
+                <a:t>Diseñar software con foco en calidad y seguridad</a:t>
               </a:r>
               <a:endParaRPr b="0" sz="1100">
                 <a:solidFill>
@@ -16508,7 +16580,7 @@
                   <a:cs typeface="Inter"/>
                   <a:sym typeface="Inter"/>
                 </a:rPr>
-                <a:t>Arquitectura React · FastAPI · SQL Server en Docker</a:t>
+                <a:t>Modelo E-R de 14 tablas en SQL Server, con migraciones</a:t>
               </a:r>
               <a:endParaRPr b="0" sz="1100">
                 <a:solidFill>
@@ -16545,7 +16617,7 @@
                   <a:cs typeface="Inter"/>
                   <a:sym typeface="Inter"/>
                 </a:rPr>
-                <a:t>JWT, bcrypt y permisos por rol en cada petición</a:t>
+                <a:t>Requisitos obtenidos del código del legado e historias de usuario</a:t>
               </a:r>
               <a:endParaRPr b="0" sz="1100">
                 <a:solidFill>
@@ -16582,7 +16654,7 @@
                   <a:cs typeface="Inter"/>
                   <a:sym typeface="Inter"/>
                 </a:rPr>
-                <a:t>46 pruebas aprobadas en la Épica 1</a:t>
+                <a:t>JWT, bcrypt, permisos por rol y 46 pruebas aprobadas</a:t>
               </a:r>
               <a:endParaRPr b="0" sz="1100">
                 <a:solidFill>

--- a/Fase 2/Evidencias Grupales/Presentacion Proyecto Fase 2.pptx
+++ b/Fase 2/Evidencias Grupales/Presentacion Proyecto Fase 2.pptx
@@ -13237,7 +13237,7 @@
                   <a:cs typeface="Plus Jakarta Sans"/>
                   <a:sym typeface="Plus Jakarta Sans"/>
                 </a:rPr>
-                <a:t>Como equipo</a:t>
+                <a:t>Relevancia profesional</a:t>
               </a:r>
               <a:endParaRPr b="1" sz="1150">
                 <a:solidFill>
@@ -13274,7 +13274,44 @@
                   <a:cs typeface="Inter"/>
                   <a:sym typeface="Inter"/>
                 </a:rPr>
-                <a:t>Proyecto industrial real, no simulado</a:t>
+                <a:t>Nos introduce al mundo empresarial</a:t>
+              </a:r>
+              <a:endParaRPr sz="950">
+                <a:solidFill>
+                  <a:srgbClr val="475569"/>
+                </a:solidFill>
+                <a:latin typeface="Inter"/>
+                <a:ea typeface="Inter"/>
+                <a:cs typeface="Inter"/>
+                <a:sym typeface="Inter"/>
+              </a:endParaRPr>
+            </a:p>
+            <a:p>
+              <a:pPr indent="-288925" lvl="0" marL="457200" rtl="0" algn="l">
+                <a:spcBef>
+                  <a:spcPts val="900"/>
+                </a:spcBef>
+                <a:spcAft>
+                  <a:spcPts val="0"/>
+                </a:spcAft>
+                <a:buClr>
+                  <a:srgbClr val="475569"/>
+                </a:buClr>
+                <a:buSzPts val="950"/>
+                <a:buFont typeface="Inter"/>
+                <a:buChar char="●"/>
+              </a:pPr>
+              <a:r>
+                <a:rPr lang="es" sz="950">
+                  <a:solidFill>
+                    <a:srgbClr val="475569"/>
+                  </a:solidFill>
+                  <a:latin typeface="Inter"/>
+                  <a:ea typeface="Inter"/>
+                  <a:cs typeface="Inter"/>
+                  <a:sym typeface="Inter"/>
+                </a:rPr>
+                <a:t>Implantar un sistema sin interrumpir la producción diaria</a:t>
               </a:r>
               <a:endParaRPr sz="950">
                 <a:solidFill>
@@ -13312,43 +13349,6 @@
                   <a:sym typeface="Inter"/>
                 </a:rPr>
                 <a:t>Trabajo ágil con Scrum y Git</a:t>
-              </a:r>
-              <a:endParaRPr sz="950">
-                <a:solidFill>
-                  <a:srgbClr val="475569"/>
-                </a:solidFill>
-                <a:latin typeface="Inter"/>
-                <a:ea typeface="Inter"/>
-                <a:cs typeface="Inter"/>
-                <a:sym typeface="Inter"/>
-              </a:endParaRPr>
-            </a:p>
-            <a:p>
-              <a:pPr indent="-288925" lvl="0" marL="457200" rtl="0" algn="l">
-                <a:spcBef>
-                  <a:spcPts val="900"/>
-                </a:spcBef>
-                <a:spcAft>
-                  <a:spcPts val="0"/>
-                </a:spcAft>
-                <a:buClr>
-                  <a:srgbClr val="475569"/>
-                </a:buClr>
-                <a:buSzPts val="950"/>
-                <a:buFont typeface="Inter"/>
-                <a:buChar char="●"/>
-              </a:pPr>
-              <a:r>
-                <a:rPr lang="es" sz="950">
-                  <a:solidFill>
-                    <a:srgbClr val="475569"/>
-                  </a:solidFill>
-                  <a:latin typeface="Inter"/>
-                  <a:ea typeface="Inter"/>
-                  <a:cs typeface="Inter"/>
-                  <a:sym typeface="Inter"/>
-                </a:rPr>
-                <a:t>Decisiones con fecha y motivo</a:t>
               </a:r>
               <a:endParaRPr sz="950">
                 <a:solidFill>
